--- a/public/fun/pack/pptx/familypro/가족소개프리미엄_41_우리부부_플래티넘아이스.pptx
+++ b/public/fun/pack/pptx/familypro/가족소개프리미엄_41_우리부부_플래티넘아이스.pptx
@@ -113,12 +113,12 @@
   <p:extLst>
     <p:ext uri="{521415D9-36F7-43E2-AB2F-B90AF26B5E84}">
       <p14:sectionLst xmlns:p14="http://schemas.microsoft.com/office/powerpoint/2010/main">
-        <p14:section name="시작" id="{FB79DE41-FD61-4182-9CBA-DBAB6EDD3E56}">
+        <p14:section name="시작" id="{EA001E9F-DBEF-4E74-A867-C757867C2D7F}">
           <p14:sldIdLst>
             <p14:sldId id="256"/>
           </p14:sldIdLst>
         </p14:section>
-        <p14:section name="본문" id="{F3707B63-D421-42FA-8208-B63DBE6073E2}">
+        <p14:section name="본문" id="{61C01B35-E238-49DA-9444-5143F4CFE31A}">
           <p14:sldIdLst>
             <p14:sldId id="257"/>
             <p14:sldId id="258"/>
@@ -127,7 +127,7 @@
             <p14:sldId id="261"/>
           </p14:sldIdLst>
         </p14:section>
-        <p14:section name="마무리" id="{8CC90CDB-2095-4F4B-AD7F-CBFADBBF7555}">
+        <p14:section name="마무리" id="{B506B9A7-800E-46EF-8566-47FD7B0F1216}">
           <p14:sldIdLst>
             <p14:sldId id="262"/>
           </p14:sldIdLst>
@@ -2691,7 +2691,7 @@
             </a:lvl1pPr>
           </a:lstStyle>
           <a:p>
-            <a:fld id="{459F493B-138E-45B1-9D40-C3BA50801D5F}" type="slidenum">
+            <a:fld id="{08A3E86D-A15E-4A0B-99D3-4D07B4B74A11}" type="slidenum">
               <a:rPr lang="en-US"/>
               <a:t>‹#›</a:t>
             </a:fld>
@@ -4593,7 +4593,7 @@
             </a:lvl1pPr>
           </a:lstStyle>
           <a:p>
-            <a:fld id="{304B0861-43C3-4507-A4A9-1CE8F367CA88}" type="slidenum">
+            <a:fld id="{B9B8EAC4-D509-4902-AB12-A691D0131381}" type="slidenum">
               <a:rPr lang="en-US"/>
               <a:t>‹#›</a:t>
             </a:fld>
@@ -5342,7 +5342,7 @@
             </a:lvl1pPr>
           </a:lstStyle>
           <a:p>
-            <a:fld id="{4A77C66D-11B5-4C75-A9CE-4C9226384F82}" type="slidenum">
+            <a:fld id="{2CFAABF2-78F3-40C7-B950-4F80F2397EB9}" type="slidenum">
               <a:rPr lang="en-US"/>
               <a:t>‹#›</a:t>
             </a:fld>
@@ -6227,7 +6227,7 @@
           <a:p>
             <a:r>
               <a:rPr lang="ko-KR"/>
-              <a:t>우리 부부 · 0000. 00. 00</a:t>
+              <a:t>우리 부부 · 날짜 입력</a:t>
             </a:r>
           </a:p>
         </p:txBody>
@@ -6472,7 +6472,7 @@
           <a:bodyPr/>
           <a:lstStyle/>
           <a:p>
-            <a:fld id="{AA7C89B8-0836-483A-A7C7-A389A7838123}" type="slidenum">
+            <a:fld id="{E4E949C9-99E2-43F1-BF8A-F804E5DC1B48}" type="slidenum">
               <a:rPr lang="en-US"/>
               <a:t>‹#›</a:t>
             </a:fld>
@@ -6902,7 +6902,7 @@
           <a:bodyPr/>
           <a:lstStyle/>
           <a:p>
-            <a:fld id="{C9409229-350A-4EF4-8FCF-C246ADC103BF}" type="slidenum">
+            <a:fld id="{F056D51F-F11A-418A-9E39-A04BECB7DF02}" type="slidenum">
               <a:rPr lang="en-US"/>
               <a:t>‹#›</a:t>
             </a:fld>
@@ -7766,7 +7766,7 @@
           <a:bodyPr/>
           <a:lstStyle/>
           <a:p>
-            <a:fld id="{A087B1E3-49EC-4C6F-A5E0-B4A0BF9FDD32}" type="slidenum">
+            <a:fld id="{CE20F0C5-BAD4-45C1-B0CC-F97DA2E5D313}" type="slidenum">
               <a:rPr lang="en-US"/>
               <a:t>‹#›</a:t>
             </a:fld>
@@ -9070,7 +9070,7 @@
           <a:bodyPr/>
           <a:lstStyle/>
           <a:p>
-            <a:fld id="{7A70AEBA-5236-4777-B6CB-A679C168C7ED}" type="slidenum">
+            <a:fld id="{418DFBE3-A807-4097-8EEF-83F8FC459FFF}" type="slidenum">
               <a:rPr lang="en-US"/>
               <a:t>‹#›</a:t>
             </a:fld>
@@ -9180,7 +9180,7 @@
           <a:bodyPr/>
           <a:lstStyle/>
           <a:p>
-            <a:fld id="{26DF63F0-A8A9-4524-86B4-CDB1F3C737C5}" type="slidenum">
+            <a:fld id="{229D9E03-8A7E-49E4-9852-678443700126}" type="slidenum">
               <a:rPr lang="en-US"/>
               <a:t>‹#›</a:t>
             </a:fld>
